--- a/assets/pptx/catalog-281.pptx
+++ b/assets/pptx/catalog-281.pptx
@@ -3468,7 +3468,7 @@
                 <a:ea typeface="Ebrima"/>
                 <a:cs typeface="Ebrima"/>
               </a:rPr>
-              <a:t>እረፍት አግኝቻለሁ ተፈትቻለሁኝ (2x)</a:t>
+              <a:t>እረፍት አግኝቻለሁ ተፈትቻለሁኝ 2x</a:t>
             </a:r>
           </a:p>
         </p:txBody>
@@ -3746,7 +3746,7 @@
                 <a:ea typeface="Ebrima"/>
                 <a:cs typeface="Ebrima"/>
               </a:rPr>
-              <a:t>እረፍት አግኝቻለሁ ተፈትቻለሁኝ (2x)</a:t>
+              <a:t>እረፍት አግኝቻለሁ ተፈትቻለሁኝ 2x</a:t>
             </a:r>
           </a:p>
         </p:txBody>
@@ -3813,7 +3813,7 @@
                 <a:ea typeface="Ebrima"/>
                 <a:cs typeface="Ebrima"/>
               </a:rPr>
-              <a:t>ተለወጥኩኝ (3x) በኢየሱስ በኢየሱስ</a:t>
+              <a:t>ተለወጥኩኝ 3x በኢየሱስ በኢየሱስ</a:t>
             </a:r>
           </a:p>
           <a:p>
@@ -4055,7 +4055,7 @@
                 <a:ea typeface="Ebrima"/>
                 <a:cs typeface="Ebrima"/>
               </a:rPr>
-              <a:t>እረፍት አለኝ (3x) በኢየሱስ በኢየሱስ</a:t>
+              <a:t>እረፍት አለኝ 3x በኢየሱስ በኢየሱስ</a:t>
             </a:r>
           </a:p>
           <a:p>
@@ -4248,7 +4248,7 @@
                 <a:ea typeface="Ebrima"/>
                 <a:cs typeface="Ebrima"/>
               </a:rPr>
-              <a:t>እረፍት አግኝቻለሁ ተፈትቻለሁኝ (2x)</a:t>
+              <a:t>እረፍት አግኝቻለሁ ተፈትቻለሁኝ 2x</a:t>
             </a:r>
           </a:p>
         </p:txBody>
@@ -4436,7 +4436,7 @@
                 <a:ea typeface="Ebrima"/>
                 <a:cs typeface="Ebrima"/>
               </a:rPr>
-              <a:t>ሰላም አለኝ (3x) በልቤ በልቤ</a:t>
+              <a:t>ሰላም አለኝ 3x በልቤ በልቤ</a:t>
             </a:r>
           </a:p>
           <a:p>
@@ -4750,7 +4750,7 @@
                 <a:ea typeface="Ebrima"/>
                 <a:cs typeface="Ebrima"/>
               </a:rPr>
-              <a:t>እረፍት አግኝቻለሁ ተፈትቻለሁኝ (2x)</a:t>
+              <a:t>እረፍት አግኝቻለሁ ተፈትቻለሁኝ 2x</a:t>
             </a:r>
           </a:p>
         </p:txBody>
@@ -4817,7 +4817,7 @@
                 <a:ea typeface="Ebrima"/>
                 <a:cs typeface="Ebrima"/>
               </a:rPr>
-              <a:t>ሰላም አለኝ (3x) በልቤ በልቤ</a:t>
+              <a:t>ሰላም አለኝ 3x በልቤ በልቤ</a:t>
             </a:r>
           </a:p>
           <a:p>
@@ -5252,7 +5252,7 @@
                 <a:ea typeface="Ebrima"/>
                 <a:cs typeface="Ebrima"/>
               </a:rPr>
-              <a:t>እረፍት አግኝቻለሁ ተፈትቻለሁኝ (2x)</a:t>
+              <a:t>እረፍት አግኝቻለሁ ተፈትቻለሁኝ 2x</a:t>
             </a:r>
           </a:p>
         </p:txBody>
